--- a/Presentation/Portfolio_Munachimso_Benson_ITAI2376.pptx/Portfolio_Munachimso_Benson_ITAI2376.pptx
+++ b/Presentation/Portfolio_Munachimso_Benson_ITAI2376.pptx/Portfolio_Munachimso_Benson_ITAI2376.pptx
@@ -114,6 +114,51 @@
     </p:ext>
   </p:extLst>
 </p:presentation>
+</file>
+
+<file path=ppt/changesInfos/changesInfo1.xml><?xml version="1.0" encoding="utf-8"?>
+<pc:chgInfo xmlns:a="http://schemas.openxmlformats.org/drawingml/2006/main" xmlns:r="http://schemas.openxmlformats.org/officeDocument/2006/relationships" xmlns:ac="http://schemas.microsoft.com/office/drawing/2013/main/command" xmlns:pc="http://schemas.microsoft.com/office/powerpoint/2013/main/command">
+  <pc:docChgLst>
+    <pc:chgData name="Chimso Benson" userId="71cb57eebe9d1e07" providerId="LiveId" clId="{F2EAF407-38DB-4B20-926D-3A2A95218D3A}"/>
+    <pc:docChg chg="modSld">
+      <pc:chgData name="Chimso Benson" userId="71cb57eebe9d1e07" providerId="LiveId" clId="{F2EAF407-38DB-4B20-926D-3A2A95218D3A}" dt="2026-05-07T02:17:53.982" v="19" actId="20577"/>
+      <pc:docMkLst>
+        <pc:docMk/>
+      </pc:docMkLst>
+      <pc:sldChg chg="modSp mod">
+        <pc:chgData name="Chimso Benson" userId="71cb57eebe9d1e07" providerId="LiveId" clId="{F2EAF407-38DB-4B20-926D-3A2A95218D3A}" dt="2026-05-07T02:17:53.982" v="19" actId="20577"/>
+        <pc:sldMkLst>
+          <pc:docMk/>
+          <pc:sldMk cId="0" sldId="260"/>
+        </pc:sldMkLst>
+        <pc:spChg chg="mod">
+          <ac:chgData name="Chimso Benson" userId="71cb57eebe9d1e07" providerId="LiveId" clId="{F2EAF407-38DB-4B20-926D-3A2A95218D3A}" dt="2026-05-07T02:17:41.480" v="15" actId="20577"/>
+          <ac:spMkLst>
+            <pc:docMk/>
+            <pc:sldMk cId="0" sldId="260"/>
+            <ac:spMk id="9" creationId="{00000000-0000-0000-0000-000000000000}"/>
+          </ac:spMkLst>
+        </pc:spChg>
+        <pc:spChg chg="mod">
+          <ac:chgData name="Chimso Benson" userId="71cb57eebe9d1e07" providerId="LiveId" clId="{F2EAF407-38DB-4B20-926D-3A2A95218D3A}" dt="2026-05-07T02:17:50.175" v="17" actId="20577"/>
+          <ac:spMkLst>
+            <pc:docMk/>
+            <pc:sldMk cId="0" sldId="260"/>
+            <ac:spMk id="13" creationId="{00000000-0000-0000-0000-000000000000}"/>
+          </ac:spMkLst>
+        </pc:spChg>
+        <pc:spChg chg="mod">
+          <ac:chgData name="Chimso Benson" userId="71cb57eebe9d1e07" providerId="LiveId" clId="{F2EAF407-38DB-4B20-926D-3A2A95218D3A}" dt="2026-05-07T02:17:53.982" v="19" actId="20577"/>
+          <ac:spMkLst>
+            <pc:docMk/>
+            <pc:sldMk cId="0" sldId="260"/>
+            <ac:spMk id="15" creationId="{00000000-0000-0000-0000-000000000000}"/>
+          </ac:spMkLst>
+        </pc:spChg>
+      </pc:sldChg>
+    </pc:docChg>
+  </pc:docChgLst>
+</pc:chgInfo>
 </file>
 
 <file path=ppt/notesMasters/notesMaster1.xml><?xml version="1.0" encoding="utf-8"?>
@@ -6346,7 +6391,7 @@
                 <a:ea typeface="Calibri" pitchFamily="34" charset="-122"/>
                 <a:cs typeface="Calibri" pitchFamily="34" charset="-120"/>
               </a:rPr>
-              <a:t>Deep learning is about choosing the right architecture for the right data — not one-size-fits-all.</a:t>
+              <a:t>Deep learning is about choosing the right architecture for the right data because its not one-size fits-all.</a:t>
             </a:r>
             <a:endParaRPr lang="en-US" sz="1100" dirty="0"/>
           </a:p>
@@ -6488,7 +6533,7 @@
                 <a:ea typeface="Calibri" pitchFamily="34" charset="-122"/>
                 <a:cs typeface="Calibri" pitchFamily="34" charset="-120"/>
               </a:rPr>
-              <a:t>Agents unlock a new level of AI utility — orchestrating models to solve real problems end-to-end.</a:t>
+              <a:t>Agents unlock a new level of AI utility - orchestrating models to solve real problems end-to-end.</a:t>
             </a:r>
             <a:endParaRPr lang="en-US" sz="1100" dirty="0"/>
           </a:p>
@@ -6559,7 +6604,29 @@
                 <a:ea typeface="Calibri" pitchFamily="34" charset="-122"/>
                 <a:cs typeface="Calibri" pitchFamily="34" charset="-120"/>
               </a:rPr>
-              <a:t>Evaluation matters as much as training — CLIP scoring, confusion matrices, and loss curves tell the full story.</a:t>
+              <a:t>Evaluation matters as much as </a:t>
+            </a:r>
+            <a:r>
+              <a:rPr lang="en-US" sz="1100">
+                <a:solidFill>
+                  <a:srgbClr val="CAE4F7"/>
+                </a:solidFill>
+                <a:latin typeface="Calibri" pitchFamily="34" charset="0"/>
+                <a:ea typeface="Calibri" pitchFamily="34" charset="-122"/>
+                <a:cs typeface="Calibri" pitchFamily="34" charset="-120"/>
+              </a:rPr>
+              <a:t>training - </a:t>
+            </a:r>
+            <a:r>
+              <a:rPr lang="en-US" sz="1100" dirty="0">
+                <a:solidFill>
+                  <a:srgbClr val="CAE4F7"/>
+                </a:solidFill>
+                <a:latin typeface="Calibri" pitchFamily="34" charset="0"/>
+                <a:ea typeface="Calibri" pitchFamily="34" charset="-122"/>
+                <a:cs typeface="Calibri" pitchFamily="34" charset="-120"/>
+              </a:rPr>
+              <a:t>CLIP scoring, confusion matrices, and loss curves tell the full story.</a:t>
             </a:r>
             <a:endParaRPr lang="en-US" sz="1100" dirty="0"/>
           </a:p>
